--- a/dist/초4/국어/토의와쓰기/초4_국어_토의와쓰기_01_의견과이유.pptx
+++ b/dist/초4/국어/토의와쓰기/초4_국어_토의와쓰기_01_의견과이유.pptx
@@ -121,13 +121,13 @@
   <p:extLst>
     <p:ext uri="{521415D9-36F7-43E2-AB2F-B90AF26B5E84}">
       <p14:sectionLst xmlns:p14="http://schemas.microsoft.com/office/powerpoint/2010/main">
-        <p14:section name="도입" id="{2456e24a-57ff-d78b-8ca2-f3e881984988}">
+        <p14:section name="도입" id="{c9d05a75-4c5d-7872-b190-b91496725309}">
           <p14:sldIdLst>
             <p14:sldId id="256"/>
             <p14:sldId id="257"/>
           </p14:sldIdLst>
         </p14:section>
-        <p14:section name="개념" id="{cd9b4549-50a0-0cd1-4556-e37211a4a606}">
+        <p14:section name="개념" id="{02140fc8-fc87-2a52-5ae5-e23340a8aa39}">
           <p14:sldIdLst>
             <p14:sldId id="258"/>
             <p14:sldId id="259"/>
@@ -136,26 +136,26 @@
             <p14:sldId id="262"/>
           </p14:sldIdLst>
         </p14:section>
-        <p14:section name="연습" id="{b2809eb1-27ed-c5c7-62e5-0466bad6938c}">
+        <p14:section name="연습" id="{a7e10937-279b-8ff8-1559-d2e9f8d6f607}">
           <p14:sldIdLst>
             <p14:sldId id="263"/>
             <p14:sldId id="264"/>
             <p14:sldId id="265"/>
           </p14:sldIdLst>
         </p14:section>
-        <p14:section name="확인" id="{521e17fc-5371-1947-4a07-4de6a12a1391}">
+        <p14:section name="확인" id="{c154775f-3a34-4a5d-f477-425358ca0806}">
           <p14:sldIdLst>
             <p14:sldId id="266"/>
             <p14:sldId id="267"/>
             <p14:sldId id="268"/>
           </p14:sldIdLst>
         </p14:section>
-        <p14:section name="정리" id="{a7eb85ad-edb0-b785-3ccb-e77c9ca7e434}">
+        <p14:section name="정리" id="{267522a7-aecf-5780-4a40-0c9cd5540090}">
           <p14:sldIdLst>
             <p14:sldId id="269"/>
           </p14:sldIdLst>
         </p14:section>
-        <p14:section name="보충" id="{18b2f525-6542-7851-456f-b6251cb4e8ab}">
+        <p14:section name="보충" id="{40b1841b-cc66-d889-bf15-ed1fb68d0052}">
           <p14:sldIdLst>
             <p14:sldId id="270"/>
           </p14:sldIdLst>
@@ -5452,7 +5452,7 @@
               <a:buNone/>
             </a:pPr>
             <a:r>
-              <a:rPr lang="ko-KR" altLang="en-US" sz="2200" b="1" dirty="0">
+              <a:rPr lang="ko-KR" altLang="en-US" sz="2400" b="1" dirty="0">
                 <a:solidFill>
                   <a:srgbClr val="FFFFFF"/>
                 </a:solidFill>
@@ -5460,9 +5460,9 @@
                 <a:ea typeface="맑은 고딕" pitchFamily="34" charset="-122"/>
                 <a:cs typeface="맑은 고딕" pitchFamily="34" charset="-120"/>
               </a:rPr>
-              <a:t>○ ‘왜냐하면 ~ 때문이에요’로 이유 들기</a:t>
-            </a:r>
-            <a:endParaRPr lang="ko-KR" sz="2200" dirty="0"/>
+              <a:t>○ 알맞은 이유 두 가지 들기</a:t>
+            </a:r>
+            <a:endParaRPr lang="ko-KR" sz="2400" dirty="0"/>
           </a:p>
         </p:txBody>
       </p:sp>
@@ -5507,7 +5507,7 @@
                 <a:ea typeface="맑은 고딕" pitchFamily="34" charset="-122"/>
                 <a:cs typeface="맑은 고딕" pitchFamily="34" charset="-120"/>
               </a:rPr>
-              <a:t>× ‘그냥’, 되풀이로 이유 대기</a:t>
+              <a:t>× ‘그냥’으로 이유 대신하기</a:t>
             </a:r>
             <a:endParaRPr lang="ko-KR" sz="2400" dirty="0"/>
           </a:p>

--- a/dist/초4/국어/토의와쓰기/초4_국어_토의와쓰기_01_의견과이유.pptx
+++ b/dist/초4/국어/토의와쓰기/초4_국어_토의와쓰기_01_의견과이유.pptx
@@ -121,13 +121,13 @@
   <p:extLst>
     <p:ext uri="{521415D9-36F7-43E2-AB2F-B90AF26B5E84}">
       <p14:sectionLst xmlns:p14="http://schemas.microsoft.com/office/powerpoint/2010/main">
-        <p14:section name="도입" id="{c9d05a75-4c5d-7872-b190-b91496725309}">
+        <p14:section name="도입" id="{e3aeb61f-06e8-baba-181d-66a84c3cf413}">
           <p14:sldIdLst>
             <p14:sldId id="256"/>
             <p14:sldId id="257"/>
           </p14:sldIdLst>
         </p14:section>
-        <p14:section name="개념" id="{02140fc8-fc87-2a52-5ae5-e23340a8aa39}">
+        <p14:section name="개념" id="{24bd4a2a-0ee2-6720-7741-96ede6956ffe}">
           <p14:sldIdLst>
             <p14:sldId id="258"/>
             <p14:sldId id="259"/>
@@ -136,26 +136,26 @@
             <p14:sldId id="262"/>
           </p14:sldIdLst>
         </p14:section>
-        <p14:section name="연습" id="{a7e10937-279b-8ff8-1559-d2e9f8d6f607}">
+        <p14:section name="연습" id="{f56bee0d-a0ea-fdde-2590-220a9abf9a3c}">
           <p14:sldIdLst>
             <p14:sldId id="263"/>
             <p14:sldId id="264"/>
             <p14:sldId id="265"/>
           </p14:sldIdLst>
         </p14:section>
-        <p14:section name="확인" id="{c154775f-3a34-4a5d-f477-425358ca0806}">
+        <p14:section name="확인" id="{89da675e-f584-6a8a-ee58-21d2429d5753}">
           <p14:sldIdLst>
             <p14:sldId id="266"/>
             <p14:sldId id="267"/>
             <p14:sldId id="268"/>
           </p14:sldIdLst>
         </p14:section>
-        <p14:section name="정리" id="{267522a7-aecf-5780-4a40-0c9cd5540090}">
+        <p14:section name="정리" id="{9fd56172-291e-dcf7-0c6c-584d25159b09}">
           <p14:sldIdLst>
             <p14:sldId id="269"/>
           </p14:sldIdLst>
         </p14:section>
-        <p14:section name="보충" id="{40b1841b-cc66-d889-bf15-ed1fb68d0052}">
+        <p14:section name="보충" id="{1a3c98f2-374f-20bf-3051-bee3a1a244db}">
           <p14:sldIdLst>
             <p14:sldId id="270"/>
           </p14:sldIdLst>
@@ -7572,7 +7572,7 @@
           </p:nvPr>
         </p:nvGraphicFramePr>
         <p:xfrm>
-          <a:off x="1065276" y="2260473"/>
+          <a:off x="1065276" y="2259330"/>
           <a:ext cx="10058400" cy="914400"/>
         </p:xfrm>
         <a:graphic>
@@ -7583,7 +7583,7 @@
                 <a:gridCol w="1810512"/>
                 <a:gridCol w="8247888"/>
               </a:tblGrid>
-              <a:tr h="511810">
+              <a:tr h="512572">
                 <a:tc>
                   <a:txBody>
                     <a:bodyPr/>
@@ -7721,7 +7721,7 @@
                   </a:tcPr>
                 </a:tc>
               </a:tr>
-              <a:tr h="511810">
+              <a:tr h="512572">
                 <a:tc>
                   <a:txBody>
                     <a:bodyPr/>
@@ -7859,7 +7859,7 @@
                   </a:tcPr>
                 </a:tc>
               </a:tr>
-              <a:tr h="511810">
+              <a:tr h="512572">
                 <a:tc>
                   <a:txBody>
                     <a:bodyPr/>

--- a/dist/초4/국어/토의와쓰기/초4_국어_토의와쓰기_01_의견과이유.pptx
+++ b/dist/초4/국어/토의와쓰기/초4_국어_토의와쓰기_01_의견과이유.pptx
@@ -121,13 +121,13 @@
   <p:extLst>
     <p:ext uri="{521415D9-36F7-43E2-AB2F-B90AF26B5E84}">
       <p14:sectionLst xmlns:p14="http://schemas.microsoft.com/office/powerpoint/2010/main">
-        <p14:section name="도입" id="{e3aeb61f-06e8-baba-181d-66a84c3cf413}">
+        <p14:section name="도입" id="{b13696c3-4b73-627c-07b0-6caac56d61db}">
           <p14:sldIdLst>
             <p14:sldId id="256"/>
             <p14:sldId id="257"/>
           </p14:sldIdLst>
         </p14:section>
-        <p14:section name="개념" id="{24bd4a2a-0ee2-6720-7741-96ede6956ffe}">
+        <p14:section name="개념" id="{279bd529-865b-07cf-41f0-1b54fa6ea849}">
           <p14:sldIdLst>
             <p14:sldId id="258"/>
             <p14:sldId id="259"/>
@@ -136,26 +136,26 @@
             <p14:sldId id="262"/>
           </p14:sldIdLst>
         </p14:section>
-        <p14:section name="연습" id="{f56bee0d-a0ea-fdde-2590-220a9abf9a3c}">
+        <p14:section name="연습" id="{5e248efe-193d-5f36-4dcc-da5adb10ba8c}">
           <p14:sldIdLst>
             <p14:sldId id="263"/>
             <p14:sldId id="264"/>
             <p14:sldId id="265"/>
           </p14:sldIdLst>
         </p14:section>
-        <p14:section name="확인" id="{89da675e-f584-6a8a-ee58-21d2429d5753}">
+        <p14:section name="확인" id="{a392ac48-9a04-5a42-324a-3db653941682}">
           <p14:sldIdLst>
             <p14:sldId id="266"/>
             <p14:sldId id="267"/>
             <p14:sldId id="268"/>
           </p14:sldIdLst>
         </p14:section>
-        <p14:section name="정리" id="{9fd56172-291e-dcf7-0c6c-584d25159b09}">
+        <p14:section name="정리" id="{0c68e1fc-1ab1-afa1-1b59-b19429fe3dda}">
           <p14:sldIdLst>
             <p14:sldId id="269"/>
           </p14:sldIdLst>
         </p14:section>
-        <p14:section name="보충" id="{1a3c98f2-374f-20bf-3051-bee3a1a244db}">
+        <p14:section name="보충" id="{ad626226-acb7-df59-c563-6f4d67e97fd9}">
           <p14:sldIdLst>
             <p14:sldId id="270"/>
           </p14:sldIdLst>
@@ -1273,7 +1273,7 @@
             <a:r>
               <a:rPr lang="en-US" dirty="0"/>
               <a:t>[S02 · 선수 학습 확인(중심 문장과 뒷받침 문장)]
-목적: 3학년 ‘문단 쓰기’(KR22-G03-KOR-PARAGRAPH-L01)에서 배운 중심 문장과 뒷받침 문장을 구별하는지 확인합니다. 이 차시는 계획상 바로 앞 차시가 없으므로, 오늘 배울 ‘의견과 이유’와 가장 가까운 이 차시의 내용을 확인합니다.
+목적: 3학년 ‘문단 쓰기’(KR22-G03-KOR-PARAGRAPH-L01)에서 배운 중심 문장과 뒷받침 문장을 구별하는지 확인합니다. 오늘 배울 ‘의견과 이유’와 이어지는 앞 차시의 내용을 확인합니다.
 시간: 약 3분
 이렇게 말해 보세요
 - “이 문단을 소리 내어 읽어 볼래? 하고 싶은 말 한 가지가 담긴 문장은 어느 것이야?”
